--- a/classes/parte-17-profundizacion-para-certificaciones/326-analisis-de-malware-para-respuesta-a-incidentes/clase-326-presentacion.pptx
+++ b/classes/parte-17-profundizacion-para-certificaciones/326-analisis-de-malware-para-respuesta-a-incidentes/clase-326-presentacion.pptx
@@ -17,6 +17,10 @@
     <p:sldId id="265" r:id="rId16"/>
     <p:sldId id="266" r:id="rId17"/>
     <p:sldId id="267" r:id="rId18"/>
+    <p:sldId id="268" r:id="rId19"/>
+    <p:sldId id="269" r:id="rId20"/>
+    <p:sldId id="270" r:id="rId21"/>
+    <p:sldId id="271" r:id="rId22"/>
   </p:sldIdLst>
   <p:sldSz cx="9144000" cy="6858000" type="screen4x3"/>
   <p:notesSz cx="6858000" cy="9144000"/>
@@ -3198,7 +3202,7 @@
                   <a:srgbClr val="0B3D2E"/>
                 </a:solidFill>
               </a:rPr>
-              <a:t>⚠️ Errores comunes</a:t>
+              <a:t>🧪 Laboratorio guiado</a:t>
             </a:r>
           </a:p>
         </p:txBody>
@@ -3236,82 +3240,97 @@
                   <a:srgbClr val="22282E"/>
                 </a:solidFill>
               </a:rPr>
-              <a:t>•  La muestra no hace "nada" al detonarla — Detecta la VM o espera comando C2; da salida de red simulada (INetSim) y revisa evasión anti-VM</a:t>
-            </a:r>
-          </a:p>
-          <a:p>
-            <a:pPr>
-              <a:spcAft>
-                <a:spcPts val="600"/>
-              </a:spcAft>
-            </a:pPr>
-            <a:r>
-              <a:rPr sz="1500">
-                <a:solidFill>
-                  <a:srgbClr val="22282E"/>
-                </a:solidFill>
-              </a:rPr>
-              <a:t>•  strings no muestra URLs ni imports útiles — Binario empaquetado; desempácalo (unpacking) o vuelca la memoria tras ejecución y aplica strings ahí</a:t>
-            </a:r>
-          </a:p>
-          <a:p>
-            <a:pPr>
-              <a:spcAft>
-                <a:spcPts val="600"/>
-              </a:spcAft>
-            </a:pPr>
-            <a:r>
-              <a:rPr sz="1500">
-                <a:solidFill>
-                  <a:srgbClr val="22282E"/>
-                </a:solidFill>
-              </a:rPr>
-              <a:t>•  Subiste la muestra a VirusTotal y era confidencial — La subida la hace pública; para muestras sensibles usa solo búsqueda por hash o sandbox local</a:t>
-            </a:r>
-          </a:p>
-          <a:p>
-            <a:pPr>
-              <a:spcAft>
-                <a:spcPts val="600"/>
-              </a:spcAft>
-            </a:pPr>
-            <a:r>
-              <a:rPr sz="1500">
-                <a:solidFill>
-                  <a:srgbClr val="22282E"/>
-                </a:solidFill>
-              </a:rPr>
-              <a:t>•  La VM de análisis "se infectó de verdad" y afectó otras máquinas — Faltó aislamiento de red o snapshot; usa red host-only/simulada y restaura snapshots siempre</a:t>
-            </a:r>
-          </a:p>
-          <a:p>
-            <a:pPr>
-              <a:spcAft>
-                <a:spcPts val="600"/>
-              </a:spcAft>
-            </a:pPr>
-            <a:r>
-              <a:rPr sz="1500">
-                <a:solidFill>
-                  <a:srgbClr val="22282E"/>
-                </a:solidFill>
-              </a:rPr>
-              <a:t>•  IOCs demasiado frágiles (solo un hash) — Un hash cambia con recompilar; prioriza IOCs de comportamiento y TTPs (pirámide del dolor)</a:t>
-            </a:r>
-          </a:p>
-          <a:p>
-            <a:pPr>
-              <a:spcAft>
-                <a:spcPts val="600"/>
-              </a:spcAft>
-            </a:pPr>
-            <a:r>
-              <a:rPr sz="1500">
-                <a:solidFill>
-                  <a:srgbClr val="22282E"/>
-                </a:solidFill>
-              </a:rPr>
-              <a:t>•  El informe es técnico pero nadie actúa — Falta resumen ejecutivo y recomendaciones claras; separa audiencia técnica de la directiva</a:t>
+              <a:t>•  Analizaremos muestra.exe en dos fases: estática (host de análisis) y dinámica (VM aislada con snapshot).</a:t>
+            </a:r>
+          </a:p>
+          <a:p>
+            <a:pPr>
+              <a:spcAft>
+                <a:spcPts val="600"/>
+              </a:spcAft>
+            </a:pPr>
+            <a:r>
+              <a:rPr sz="1500">
+                <a:solidFill>
+                  <a:srgbClr val="22282E"/>
+                </a:solidFill>
+              </a:rPr>
+              <a:t>•  Fase 1 — Triaje estático (sin ejecutar):</a:t>
+            </a:r>
+          </a:p>
+          <a:p>
+            <a:pPr>
+              <a:spcAft>
+                <a:spcPts val="600"/>
+              </a:spcAft>
+            </a:pPr>
+            <a:r>
+              <a:rPr sz="1500">
+                <a:solidFill>
+                  <a:srgbClr val="22282E"/>
+                </a:solidFill>
+              </a:rPr>
+              <a:t>•  Identifica y hashea la muestra:</a:t>
+            </a:r>
+          </a:p>
+          <a:p>
+            <a:pPr>
+              <a:spcAft>
+                <a:spcPts val="600"/>
+              </a:spcAft>
+            </a:pPr>
+            <a:r>
+              <a:rPr sz="1500">
+                <a:solidFill>
+                  <a:srgbClr val="22282E"/>
+                </a:solidFill>
+              </a:rPr>
+              <a:t>•  Busca el hash en tu inteligencia de amenazas para ver si ya está catalogado.</a:t>
+            </a:r>
+          </a:p>
+          <a:p>
+            <a:pPr>
+              <a:spcAft>
+                <a:spcPts val="600"/>
+              </a:spcAft>
+            </a:pPr>
+            <a:r>
+              <a:rPr sz="1500">
+                <a:solidFill>
+                  <a:srgbClr val="22282E"/>
+                </a:solidFill>
+              </a:rPr>
+              <a:t>•  Mide la entropía y detecta empaquetado:</a:t>
+            </a:r>
+          </a:p>
+          <a:p>
+            <a:pPr>
+              <a:spcAft>
+                <a:spcPts val="600"/>
+              </a:spcAft>
+            </a:pPr>
+            <a:r>
+              <a:rPr sz="1500">
+                <a:solidFill>
+                  <a:srgbClr val="22282E"/>
+                </a:solidFill>
+              </a:rPr>
+              <a:t>•  Secciones con entropía &gt; 7.0 e imports casi vacíos sugieren packer.</a:t>
+            </a:r>
+          </a:p>
+          <a:p>
+            <a:pPr>
+              <a:spcAft>
+                <a:spcPts val="600"/>
+              </a:spcAft>
+            </a:pPr>
+            <a:r>
+              <a:rPr sz="1500">
+                <a:solidFill>
+                  <a:srgbClr val="22282E"/>
+                </a:solidFill>
+              </a:rPr>
+              <a:t>•  Extrae cadenas e imports relevantes:</a:t>
             </a:r>
           </a:p>
         </p:txBody>
@@ -3362,7 +3381,7 @@
                   <a:srgbClr val="0B3D2E"/>
                 </a:solidFill>
               </a:rPr>
-              <a:t>❓ Preguntas frecuentes</a:t>
+              <a:t>✍️ Ejercicios</a:t>
             </a:r>
           </a:p>
         </p:txBody>
@@ -3400,97 +3419,82 @@
                   <a:srgbClr val="22282E"/>
                 </a:solidFill>
               </a:rPr>
-              <a:t>•  ❓ ¿Cuánto análisis es suficiente en un incidente?</a:t>
-            </a:r>
-          </a:p>
-          <a:p>
-            <a:pPr>
-              <a:spcAft>
-                <a:spcPts val="600"/>
-              </a:spcAft>
-            </a:pPr>
-            <a:r>
-              <a:rPr sz="1500">
-                <a:solidFill>
-                  <a:srgbClr val="22282E"/>
-                </a:solidFill>
-              </a:rPr>
-              <a:t>•  El justo para contener y erradicar: IOCs accionables, mecanismo de persistencia y TTPs. La ingeniería inversa completa es un lujo que rara vez cabe en el reloj del incidente.</a:t>
-            </a:r>
-          </a:p>
-          <a:p>
-            <a:pPr>
-              <a:spcAft>
-                <a:spcPts val="600"/>
-              </a:spcAft>
-            </a:pPr>
-            <a:r>
-              <a:rPr sz="1500">
-                <a:solidFill>
-                  <a:srgbClr val="22282E"/>
-                </a:solidFill>
-              </a:rPr>
-              <a:t>•  ❓ ¿Puedo confiar solo en una sandbox automática?</a:t>
-            </a:r>
-          </a:p>
-          <a:p>
-            <a:pPr>
-              <a:spcAft>
-                <a:spcPts val="600"/>
-              </a:spcAft>
-            </a:pPr>
-            <a:r>
-              <a:rPr sz="1500">
-                <a:solidFill>
-                  <a:srgbClr val="22282E"/>
-                </a:solidFill>
-              </a:rPr>
-              <a:t>•  Son un gran punto de partida, pero el malware evasivo detecta sandboxes y ajusta su comportamiento. Complementa con análisis manual y correlación con tu telemetría.</a:t>
-            </a:r>
-          </a:p>
-          <a:p>
-            <a:pPr>
-              <a:spcAft>
-                <a:spcPts val="600"/>
-              </a:spcAft>
-            </a:pPr>
-            <a:r>
-              <a:rPr sz="1500">
-                <a:solidFill>
-                  <a:srgbClr val="22282E"/>
-                </a:solidFill>
-              </a:rPr>
-              <a:t>•  ❓ ¿Por qué priorizar TTPs sobre hashes?</a:t>
-            </a:r>
-          </a:p>
-          <a:p>
-            <a:pPr>
-              <a:spcAft>
-                <a:spcPts val="600"/>
-              </a:spcAft>
-            </a:pPr>
-            <a:r>
-              <a:rPr sz="1500">
-                <a:solidFill>
-                  <a:srgbClr val="22282E"/>
-                </a:solidFill>
-              </a:rPr>
-              <a:t>•  Según la "pirámide del dolor", cambiar un hash o una IP es trivial para el atacante; cambiar sus TTPs es costoso. Detectar comportamiento resiste mejor la rotación de indicadores.</a:t>
-            </a:r>
-          </a:p>
-          <a:p>
-            <a:pPr>
-              <a:spcAft>
-                <a:spcPts val="600"/>
-              </a:spcAft>
-            </a:pPr>
-            <a:r>
-              <a:rPr sz="1500">
-                <a:solidFill>
-                  <a:srgbClr val="22282E"/>
-                </a:solidFill>
-              </a:rPr>
-              <a:t>•  ❓ ¿Es seguro usar servicios online de análisis?</a:t>
+              <a:t>•  Toma tres muestras de práctica y clasifícalas como empaquetada / no empaquetada usando entropía e imports.</a:t>
+            </a:r>
+          </a:p>
+          <a:p>
+            <a:pPr>
+              <a:spcAft>
+                <a:spcPts val="600"/>
+              </a:spcAft>
+            </a:pPr>
+            <a:r>
+              <a:rPr sz="1500">
+                <a:solidFill>
+                  <a:srgbClr val="22282E"/>
+                </a:solidFill>
+              </a:rPr>
+              <a:t>•  Extrae de una muestra al menos cinco IOCs (2 de red, 3 de host) y preséntalos en formato tabla.</a:t>
+            </a:r>
+          </a:p>
+          <a:p>
+            <a:pPr>
+              <a:spcAft>
+                <a:spcPts val="600"/>
+              </a:spcAft>
+            </a:pPr>
+            <a:r>
+              <a:rPr sz="1500">
+                <a:solidFill>
+                  <a:srgbClr val="22282E"/>
+                </a:solidFill>
+              </a:rPr>
+              <a:t>•  Escribe una regla YARA sencilla que detecte una cadena única de tu muestra y valídala.</a:t>
+            </a:r>
+          </a:p>
+          <a:p>
+            <a:pPr>
+              <a:spcAft>
+                <a:spcPts val="600"/>
+              </a:spcAft>
+            </a:pPr>
+            <a:r>
+              <a:rPr sz="1500">
+                <a:solidFill>
+                  <a:srgbClr val="22282E"/>
+                </a:solidFill>
+              </a:rPr>
+              <a:t>•  Detona una muestra en la VM aislada y documenta su mecanismo de persistencia con evidencia de Regshot.</a:t>
+            </a:r>
+          </a:p>
+          <a:p>
+            <a:pPr>
+              <a:spcAft>
+                <a:spcPts val="600"/>
+              </a:spcAft>
+            </a:pPr>
+            <a:r>
+              <a:rPr sz="1500">
+                <a:solidFill>
+                  <a:srgbClr val="22282E"/>
+                </a:solidFill>
+              </a:rPr>
+              <a:t>•  Ejecuta capa sobre un binario y traduce tres capacidades a técnicas ATT&amp;CK con su ID.</a:t>
+            </a:r>
+          </a:p>
+          <a:p>
+            <a:pPr>
+              <a:spcAft>
+                <a:spcPts val="600"/>
+              </a:spcAft>
+            </a:pPr>
+            <a:r>
+              <a:rPr sz="1500">
+                <a:solidFill>
+                  <a:srgbClr val="22282E"/>
+                </a:solidFill>
+              </a:rPr>
+              <a:t>•  Correlaciona la hora de un archivo soltado por el malware con un evento de Sysmon para situarlo en la timeline.</a:t>
             </a:r>
           </a:p>
         </p:txBody>
@@ -3541,7 +3545,7 @@
                   <a:srgbClr val="0B3D2E"/>
                 </a:solidFill>
               </a:rPr>
-              <a:t>🔗 Referencias</a:t>
+              <a:t>📝 Reto verificable</a:t>
             </a:r>
           </a:p>
         </p:txBody>
@@ -3579,6 +3583,438 @@
                   <a:srgbClr val="22282E"/>
                 </a:solidFill>
               </a:rPr>
+              <a:t>•  Recibes dropper.exe como parte de un incidente en curso. Criterio de aceptación: entregas un mini-informe DFIR de una página que incluye (a) hash SHA-256 y veredicto de empaquetado, (b) al menos 4…</a:t>
+            </a:r>
+          </a:p>
+        </p:txBody>
+      </p:sp>
+    </p:spTree>
+  </p:cSld>
+  <p:clrMapOvr>
+    <a:masterClrMapping/>
+  </p:clrMapOvr>
+</p:sld>
+</file>
+
+<file path=ppt/slides/slide13.xml><?xml version="1.0" encoding="utf-8"?>
+<p:sld xmlns:a="http://schemas.openxmlformats.org/drawingml/2006/main" xmlns:p="http://schemas.openxmlformats.org/presentationml/2006/main" xmlns:r="http://schemas.openxmlformats.org/officeDocument/2006/relationships">
+  <p:cSld>
+    <p:spTree>
+      <p:nvGrpSpPr>
+        <p:cNvPr id="1" name=""/>
+        <p:cNvGrpSpPr/>
+        <p:nvPr/>
+      </p:nvGrpSpPr>
+      <p:grpSpPr/>
+      <p:sp>
+        <p:nvSpPr>
+          <p:cNvPr id="2" name="TextBox 1"/>
+          <p:cNvSpPr txBox="1"/>
+          <p:nvPr/>
+        </p:nvSpPr>
+        <p:spPr>
+          <a:xfrm>
+            <a:off x="457200" y="320040"/>
+            <a:ext cx="8229600" cy="822960"/>
+          </a:xfrm>
+          <a:prstGeom prst="rect">
+            <a:avLst/>
+          </a:prstGeom>
+          <a:noFill/>
+        </p:spPr>
+        <p:txBody>
+          <a:bodyPr wrap="square">
+            <a:spAutoFit/>
+          </a:bodyPr>
+          <a:lstStyle/>
+          <a:p>
+            <a:r>
+              <a:rPr sz="2600" b="1">
+                <a:solidFill>
+                  <a:srgbClr val="0B3D2E"/>
+                </a:solidFill>
+              </a:rPr>
+              <a:t>⚠️ Errores comunes</a:t>
+            </a:r>
+          </a:p>
+        </p:txBody>
+      </p:sp>
+      <p:sp>
+        <p:nvSpPr>
+          <p:cNvPr id="3" name="TextBox 2"/>
+          <p:cNvSpPr txBox="1"/>
+          <p:nvPr/>
+        </p:nvSpPr>
+        <p:spPr>
+          <a:xfrm>
+            <a:off x="457200" y="1280160"/>
+            <a:ext cx="8229600" cy="4937760"/>
+          </a:xfrm>
+          <a:prstGeom prst="rect">
+            <a:avLst/>
+          </a:prstGeom>
+          <a:noFill/>
+        </p:spPr>
+        <p:txBody>
+          <a:bodyPr wrap="square">
+            <a:spAutoFit/>
+          </a:bodyPr>
+          <a:lstStyle/>
+          <a:p>
+            <a:pPr>
+              <a:spcAft>
+                <a:spcPts val="600"/>
+              </a:spcAft>
+            </a:pPr>
+            <a:r>
+              <a:rPr sz="1500">
+                <a:solidFill>
+                  <a:srgbClr val="22282E"/>
+                </a:solidFill>
+              </a:rPr>
+              <a:t>•  La muestra no hace "nada" al detonarla — Detecta la VM o espera comando C2; da salida de red simulada (INetSim) y revisa evasión anti-VM</a:t>
+            </a:r>
+          </a:p>
+          <a:p>
+            <a:pPr>
+              <a:spcAft>
+                <a:spcPts val="600"/>
+              </a:spcAft>
+            </a:pPr>
+            <a:r>
+              <a:rPr sz="1500">
+                <a:solidFill>
+                  <a:srgbClr val="22282E"/>
+                </a:solidFill>
+              </a:rPr>
+              <a:t>•  strings no muestra URLs ni imports útiles — Binario empaquetado; desempácalo (unpacking) o vuelca la memoria tras ejecución y aplica strings ahí</a:t>
+            </a:r>
+          </a:p>
+          <a:p>
+            <a:pPr>
+              <a:spcAft>
+                <a:spcPts val="600"/>
+              </a:spcAft>
+            </a:pPr>
+            <a:r>
+              <a:rPr sz="1500">
+                <a:solidFill>
+                  <a:srgbClr val="22282E"/>
+                </a:solidFill>
+              </a:rPr>
+              <a:t>•  Subiste la muestra a VirusTotal y era confidencial — La subida la hace pública; para muestras sensibles usa solo búsqueda por hash o sandbox local</a:t>
+            </a:r>
+          </a:p>
+          <a:p>
+            <a:pPr>
+              <a:spcAft>
+                <a:spcPts val="600"/>
+              </a:spcAft>
+            </a:pPr>
+            <a:r>
+              <a:rPr sz="1500">
+                <a:solidFill>
+                  <a:srgbClr val="22282E"/>
+                </a:solidFill>
+              </a:rPr>
+              <a:t>•  La VM de análisis "se infectó de verdad" y afectó otras máquinas — Faltó aislamiento de red o snapshot; usa red host-only/simulada y restaura snapshots siempre</a:t>
+            </a:r>
+          </a:p>
+          <a:p>
+            <a:pPr>
+              <a:spcAft>
+                <a:spcPts val="600"/>
+              </a:spcAft>
+            </a:pPr>
+            <a:r>
+              <a:rPr sz="1500">
+                <a:solidFill>
+                  <a:srgbClr val="22282E"/>
+                </a:solidFill>
+              </a:rPr>
+              <a:t>•  IOCs demasiado frágiles (solo un hash) — Un hash cambia con recompilar; prioriza IOCs de comportamiento y TTPs (pirámide del dolor)</a:t>
+            </a:r>
+          </a:p>
+          <a:p>
+            <a:pPr>
+              <a:spcAft>
+                <a:spcPts val="600"/>
+              </a:spcAft>
+            </a:pPr>
+            <a:r>
+              <a:rPr sz="1500">
+                <a:solidFill>
+                  <a:srgbClr val="22282E"/>
+                </a:solidFill>
+              </a:rPr>
+              <a:t>•  El informe es técnico pero nadie actúa — Falta resumen ejecutivo y recomendaciones claras; separa audiencia técnica de la directiva</a:t>
+            </a:r>
+          </a:p>
+        </p:txBody>
+      </p:sp>
+    </p:spTree>
+  </p:cSld>
+  <p:clrMapOvr>
+    <a:masterClrMapping/>
+  </p:clrMapOvr>
+</p:sld>
+</file>
+
+<file path=ppt/slides/slide14.xml><?xml version="1.0" encoding="utf-8"?>
+<p:sld xmlns:a="http://schemas.openxmlformats.org/drawingml/2006/main" xmlns:p="http://schemas.openxmlformats.org/presentationml/2006/main" xmlns:r="http://schemas.openxmlformats.org/officeDocument/2006/relationships">
+  <p:cSld>
+    <p:spTree>
+      <p:nvGrpSpPr>
+        <p:cNvPr id="1" name=""/>
+        <p:cNvGrpSpPr/>
+        <p:nvPr/>
+      </p:nvGrpSpPr>
+      <p:grpSpPr/>
+      <p:sp>
+        <p:nvSpPr>
+          <p:cNvPr id="2" name="TextBox 1"/>
+          <p:cNvSpPr txBox="1"/>
+          <p:nvPr/>
+        </p:nvSpPr>
+        <p:spPr>
+          <a:xfrm>
+            <a:off x="457200" y="320040"/>
+            <a:ext cx="8229600" cy="822960"/>
+          </a:xfrm>
+          <a:prstGeom prst="rect">
+            <a:avLst/>
+          </a:prstGeom>
+          <a:noFill/>
+        </p:spPr>
+        <p:txBody>
+          <a:bodyPr wrap="square">
+            <a:spAutoFit/>
+          </a:bodyPr>
+          <a:lstStyle/>
+          <a:p>
+            <a:r>
+              <a:rPr sz="2600" b="1">
+                <a:solidFill>
+                  <a:srgbClr val="0B3D2E"/>
+                </a:solidFill>
+              </a:rPr>
+              <a:t>❓ Preguntas frecuentes</a:t>
+            </a:r>
+          </a:p>
+        </p:txBody>
+      </p:sp>
+      <p:sp>
+        <p:nvSpPr>
+          <p:cNvPr id="3" name="TextBox 2"/>
+          <p:cNvSpPr txBox="1"/>
+          <p:nvPr/>
+        </p:nvSpPr>
+        <p:spPr>
+          <a:xfrm>
+            <a:off x="457200" y="1280160"/>
+            <a:ext cx="8229600" cy="4937760"/>
+          </a:xfrm>
+          <a:prstGeom prst="rect">
+            <a:avLst/>
+          </a:prstGeom>
+          <a:noFill/>
+        </p:spPr>
+        <p:txBody>
+          <a:bodyPr wrap="square">
+            <a:spAutoFit/>
+          </a:bodyPr>
+          <a:lstStyle/>
+          <a:p>
+            <a:pPr>
+              <a:spcAft>
+                <a:spcPts val="600"/>
+              </a:spcAft>
+            </a:pPr>
+            <a:r>
+              <a:rPr sz="1500">
+                <a:solidFill>
+                  <a:srgbClr val="22282E"/>
+                </a:solidFill>
+              </a:rPr>
+              <a:t>•  ❓ ¿Cuánto análisis es suficiente en un incidente?</a:t>
+            </a:r>
+          </a:p>
+          <a:p>
+            <a:pPr>
+              <a:spcAft>
+                <a:spcPts val="600"/>
+              </a:spcAft>
+            </a:pPr>
+            <a:r>
+              <a:rPr sz="1500">
+                <a:solidFill>
+                  <a:srgbClr val="22282E"/>
+                </a:solidFill>
+              </a:rPr>
+              <a:t>•  El justo para contener y erradicar: IOCs accionables, mecanismo de persistencia y TTPs. La ingeniería inversa completa es un lujo que rara vez cabe en el reloj del incidente.</a:t>
+            </a:r>
+          </a:p>
+          <a:p>
+            <a:pPr>
+              <a:spcAft>
+                <a:spcPts val="600"/>
+              </a:spcAft>
+            </a:pPr>
+            <a:r>
+              <a:rPr sz="1500">
+                <a:solidFill>
+                  <a:srgbClr val="22282E"/>
+                </a:solidFill>
+              </a:rPr>
+              <a:t>•  ❓ ¿Puedo confiar solo en una sandbox automática?</a:t>
+            </a:r>
+          </a:p>
+          <a:p>
+            <a:pPr>
+              <a:spcAft>
+                <a:spcPts val="600"/>
+              </a:spcAft>
+            </a:pPr>
+            <a:r>
+              <a:rPr sz="1500">
+                <a:solidFill>
+                  <a:srgbClr val="22282E"/>
+                </a:solidFill>
+              </a:rPr>
+              <a:t>•  Son un gran punto de partida, pero el malware evasivo detecta sandboxes y ajusta su comportamiento. Complementa con análisis manual y correlación con tu telemetría.</a:t>
+            </a:r>
+          </a:p>
+          <a:p>
+            <a:pPr>
+              <a:spcAft>
+                <a:spcPts val="600"/>
+              </a:spcAft>
+            </a:pPr>
+            <a:r>
+              <a:rPr sz="1500">
+                <a:solidFill>
+                  <a:srgbClr val="22282E"/>
+                </a:solidFill>
+              </a:rPr>
+              <a:t>•  ❓ ¿Por qué priorizar TTPs sobre hashes?</a:t>
+            </a:r>
+          </a:p>
+          <a:p>
+            <a:pPr>
+              <a:spcAft>
+                <a:spcPts val="600"/>
+              </a:spcAft>
+            </a:pPr>
+            <a:r>
+              <a:rPr sz="1500">
+                <a:solidFill>
+                  <a:srgbClr val="22282E"/>
+                </a:solidFill>
+              </a:rPr>
+              <a:t>•  Según la "pirámide del dolor", cambiar un hash o una IP es trivial para el atacante; cambiar sus TTPs es costoso. Detectar comportamiento resiste mejor la rotación de indicadores.</a:t>
+            </a:r>
+          </a:p>
+          <a:p>
+            <a:pPr>
+              <a:spcAft>
+                <a:spcPts val="600"/>
+              </a:spcAft>
+            </a:pPr>
+            <a:r>
+              <a:rPr sz="1500">
+                <a:solidFill>
+                  <a:srgbClr val="22282E"/>
+                </a:solidFill>
+              </a:rPr>
+              <a:t>•  ❓ ¿Es seguro usar servicios online de análisis?</a:t>
+            </a:r>
+          </a:p>
+        </p:txBody>
+      </p:sp>
+    </p:spTree>
+  </p:cSld>
+  <p:clrMapOvr>
+    <a:masterClrMapping/>
+  </p:clrMapOvr>
+</p:sld>
+</file>
+
+<file path=ppt/slides/slide15.xml><?xml version="1.0" encoding="utf-8"?>
+<p:sld xmlns:a="http://schemas.openxmlformats.org/drawingml/2006/main" xmlns:p="http://schemas.openxmlformats.org/presentationml/2006/main" xmlns:r="http://schemas.openxmlformats.org/officeDocument/2006/relationships">
+  <p:cSld>
+    <p:spTree>
+      <p:nvGrpSpPr>
+        <p:cNvPr id="1" name=""/>
+        <p:cNvGrpSpPr/>
+        <p:nvPr/>
+      </p:nvGrpSpPr>
+      <p:grpSpPr/>
+      <p:sp>
+        <p:nvSpPr>
+          <p:cNvPr id="2" name="TextBox 1"/>
+          <p:cNvSpPr txBox="1"/>
+          <p:nvPr/>
+        </p:nvSpPr>
+        <p:spPr>
+          <a:xfrm>
+            <a:off x="457200" y="320040"/>
+            <a:ext cx="8229600" cy="822960"/>
+          </a:xfrm>
+          <a:prstGeom prst="rect">
+            <a:avLst/>
+          </a:prstGeom>
+          <a:noFill/>
+        </p:spPr>
+        <p:txBody>
+          <a:bodyPr wrap="square">
+            <a:spAutoFit/>
+          </a:bodyPr>
+          <a:lstStyle/>
+          <a:p>
+            <a:r>
+              <a:rPr sz="2600" b="1">
+                <a:solidFill>
+                  <a:srgbClr val="0B3D2E"/>
+                </a:solidFill>
+              </a:rPr>
+              <a:t>🔗 Referencias</a:t>
+            </a:r>
+          </a:p>
+        </p:txBody>
+      </p:sp>
+      <p:sp>
+        <p:nvSpPr>
+          <p:cNvPr id="3" name="TextBox 2"/>
+          <p:cNvSpPr txBox="1"/>
+          <p:nvPr/>
+        </p:nvSpPr>
+        <p:spPr>
+          <a:xfrm>
+            <a:off x="457200" y="1280160"/>
+            <a:ext cx="8229600" cy="4937760"/>
+          </a:xfrm>
+          <a:prstGeom prst="rect">
+            <a:avLst/>
+          </a:prstGeom>
+          <a:noFill/>
+        </p:spPr>
+        <p:txBody>
+          <a:bodyPr wrap="square">
+            <a:spAutoFit/>
+          </a:bodyPr>
+          <a:lstStyle/>
+          <a:p>
+            <a:pPr>
+              <a:spcAft>
+                <a:spcPts val="600"/>
+              </a:spcAft>
+            </a:pPr>
+            <a:r>
+              <a:rPr sz="1500">
+                <a:solidFill>
+                  <a:srgbClr val="22282E"/>
+                </a:solidFill>
+              </a:rPr>
               <a:t>•  Sikorski &amp; Honig — Practical Malware Analysis (No Starch Press).</a:t>
             </a:r>
           </a:p>
@@ -3644,6 +4080,81 @@
           </a:p>
         </p:txBody>
       </p:sp>
+    </p:spTree>
+  </p:cSld>
+  <p:clrMapOvr>
+    <a:masterClrMapping/>
+  </p:clrMapOvr>
+</p:sld>
+</file>
+
+<file path=ppt/slides/slide16.xml><?xml version="1.0" encoding="utf-8"?>
+<p:sld xmlns:a="http://schemas.openxmlformats.org/drawingml/2006/main" xmlns:p="http://schemas.openxmlformats.org/presentationml/2006/main" xmlns:r="http://schemas.openxmlformats.org/officeDocument/2006/relationships">
+  <p:cSld>
+    <p:spTree>
+      <p:nvGrpSpPr>
+        <p:cNvPr id="1" name=""/>
+        <p:cNvGrpSpPr/>
+        <p:nvPr/>
+      </p:nvGrpSpPr>
+      <p:grpSpPr/>
+      <p:sp>
+        <p:nvSpPr>
+          <p:cNvPr id="2" name="TextBox 1"/>
+          <p:cNvSpPr txBox="1"/>
+          <p:nvPr/>
+        </p:nvSpPr>
+        <p:spPr>
+          <a:xfrm>
+            <a:off x="457200" y="274320"/>
+            <a:ext cx="8229600" cy="640080"/>
+          </a:xfrm>
+          <a:prstGeom prst="rect">
+            <a:avLst/>
+          </a:prstGeom>
+          <a:noFill/>
+        </p:spPr>
+        <p:txBody>
+          <a:bodyPr wrap="square">
+            <a:spAutoFit/>
+          </a:bodyPr>
+          <a:lstStyle/>
+          <a:p>
+            <a:r>
+              <a:rPr sz="2200" b="1">
+                <a:solidFill>
+                  <a:srgbClr val="0B3D2E"/>
+                </a:solidFill>
+              </a:rPr>
+              <a:t>Diagrama de la clase</a:t>
+            </a:r>
+          </a:p>
+        </p:txBody>
+      </p:sp>
+      <p:pic>
+        <p:nvPicPr>
+          <p:cNvPr id="3" name="Picture 2" descr="7b5bcb0a14fe8d8d.png"/>
+          <p:cNvPicPr>
+            <a:picLocks noChangeAspect="1"/>
+          </p:cNvPicPr>
+          <p:nvPr/>
+        </p:nvPicPr>
+        <p:blipFill>
+          <a:blip r:embed="rId2"/>
+          <a:stretch>
+            <a:fillRect/>
+          </a:stretch>
+        </p:blipFill>
+        <p:spPr>
+          <a:xfrm>
+            <a:off x="457200" y="3330383"/>
+            <a:ext cx="8229600" cy="837313"/>
+          </a:xfrm>
+          <a:prstGeom prst="rect">
+            <a:avLst/>
+          </a:prstGeom>
+        </p:spPr>
+      </p:pic>
     </p:spTree>
   </p:cSld>
   <p:clrMapOvr>
@@ -3728,7 +4239,7 @@
                   <a:srgbClr val="22282E"/>
                 </a:solidFill>
               </a:rPr>
-              <a:t>•  Aprender el análisis de malware orientado a la respuesta a incidentes: no un desensamblado exhaustivo, sino un triaje rápido que en minutos extrae los IOCs necesarios para contener y erradicar la amenaza, alimenta la línea de tiempo del incidente y produce un informe DFIR accionable. El foco es la velocidad y la utilidad operativa que exigen los roles de analista de incidentes de BTL1 y SANS FOR610, no la ingeniería inversa completa.</a:t>
+              <a:t>•  Aprender el análisis de malware orientado a la respuesta a incidentes: no un desensamblado exhaustivo, sino un triaje rápido que en minutos extrae los IOCs necesarios para contener y erradicar la…</a:t>
             </a:r>
           </a:p>
         </p:txBody>
@@ -4137,7 +4648,7 @@
                   <a:srgbClr val="0B3D2E"/>
                 </a:solidFill>
               </a:rPr>
-              <a:t>📖 Definiciones y características</a:t>
+              <a:t>🧠 Modelo mental y caso de decisión</a:t>
             </a:r>
           </a:p>
         </p:txBody>
@@ -4175,97 +4686,22 @@
                   <a:srgbClr val="22282E"/>
                 </a:solidFill>
               </a:rPr>
-              <a:t>•  Triaje de malware: evaluación inicial rápida para priorizar. Característica clave: busca suficiente información para decidir y actuar, no el análisis total.</a:t>
-            </a:r>
-          </a:p>
-          <a:p>
-            <a:pPr>
-              <a:spcAft>
-                <a:spcPts val="600"/>
-              </a:spcAft>
-            </a:pPr>
-            <a:r>
-              <a:rPr sz="1500">
-                <a:solidFill>
-                  <a:srgbClr val="22282E"/>
-                </a:solidFill>
-              </a:rPr>
-              <a:t>•  IOC (Indicator of Compromise): artefacto observable que evidencia una intrusión (hash, IP, dominio, mutex, ruta). Característica clave: accionable para detección y bloqueo.</a:t>
-            </a:r>
-          </a:p>
-          <a:p>
-            <a:pPr>
-              <a:spcAft>
-                <a:spcPts val="600"/>
-              </a:spcAft>
-            </a:pPr>
-            <a:r>
-              <a:rPr sz="1500">
-                <a:solidFill>
-                  <a:srgbClr val="22282E"/>
-                </a:solidFill>
-              </a:rPr>
-              <a:t>•  Análisis estático: examen del binario sin ejecutarlo. Característica clave: seguro y rápido, pero limitado frente a ofuscación y empaquetado.</a:t>
-            </a:r>
-          </a:p>
-          <a:p>
-            <a:pPr>
-              <a:spcAft>
-                <a:spcPts val="600"/>
-              </a:spcAft>
-            </a:pPr>
-            <a:r>
-              <a:rPr sz="1500">
-                <a:solidFill>
-                  <a:srgbClr val="22282E"/>
-                </a:solidFill>
-              </a:rPr>
-              <a:t>•  Análisis dinámico: observación del malware en ejecución en un entorno controlado. Característica clave: revela comportamiento real, pero requiere aislamiento estricto.</a:t>
-            </a:r>
-          </a:p>
-          <a:p>
-            <a:pPr>
-              <a:spcAft>
-                <a:spcPts val="600"/>
-              </a:spcAft>
-            </a:pPr>
-            <a:r>
-              <a:rPr sz="1500">
-                <a:solidFill>
-                  <a:srgbClr val="22282E"/>
-                </a:solidFill>
-              </a:rPr>
-              <a:t>•  YARA: lenguaje de reglas para identificar patrones en archivos/memoria. Característica clave: reutilizable para hunting a escala.</a:t>
-            </a:r>
-          </a:p>
-          <a:p>
-            <a:pPr>
-              <a:spcAft>
-                <a:spcPts val="600"/>
-              </a:spcAft>
-            </a:pPr>
-            <a:r>
-              <a:rPr sz="1500">
-                <a:solidFill>
-                  <a:srgbClr val="22282E"/>
-                </a:solidFill>
-              </a:rPr>
-              <a:t>•  capa: herramienta que infiere capacidades del binario (p. ej. "crea servicio", "captura teclado") a partir de patrones. Característica clave: traduce bytes en comportamiento legible y lo mapea a ATT&amp;CK.</a:t>
-            </a:r>
-          </a:p>
-          <a:p>
-            <a:pPr>
-              <a:spcAft>
-                <a:spcPts val="600"/>
-              </a:spcAft>
-            </a:pPr>
-            <a:r>
-              <a:rPr sz="1500">
-                <a:solidFill>
-                  <a:srgbClr val="22282E"/>
-                </a:solidFill>
-              </a:rPr>
-              <a:t>•  TTP (Tácticas, Técnicas y Procedimientos): el cómo del adversario. Característica clave: más estable que los IOCs (la "pirámide del dolor" de David Bianco).</a:t>
+              <a:t>•  El análisis para IR responde capacidades, alcance e indicadores accionables con profundidad proporcional al incidente.</a:t>
+            </a:r>
+          </a:p>
+          <a:p>
+            <a:pPr>
+              <a:spcAft>
+                <a:spcPts val="600"/>
+              </a:spcAft>
+            </a:pPr>
+            <a:r>
+              <a:rPr sz="1500">
+                <a:solidFill>
+                  <a:srgbClr val="22282E"/>
+                </a:solidFill>
+              </a:rPr>
+              <a:t>•  Caso razonado. Un hash bloquea una muestra, pero configuración y dominio revelan familia y alcance más útil.</a:t>
             </a:r>
           </a:p>
         </p:txBody>
@@ -4316,7 +4752,7 @@
                   <a:srgbClr val="0B3D2E"/>
                 </a:solidFill>
               </a:rPr>
-              <a:t>🧰 Herramientas y preparación</a:t>
+              <a:t>📔 Glosario operativo complementario</a:t>
             </a:r>
           </a:p>
         </p:txBody>
@@ -4354,52 +4790,52 @@
                   <a:srgbClr val="22282E"/>
                 </a:solidFill>
               </a:rPr>
-              <a:t>•  Estático: file, sha256sum, strings, pefile/PE-bear, Detect It Easy (DIE), capa, yara.</a:t>
-            </a:r>
-          </a:p>
-          <a:p>
-            <a:pPr>
-              <a:spcAft>
-                <a:spcPts val="600"/>
-              </a:spcAft>
-            </a:pPr>
-            <a:r>
-              <a:rPr sz="1500">
-                <a:solidFill>
-                  <a:srgbClr val="22282E"/>
-                </a:solidFill>
-              </a:rPr>
-              <a:t>•  Dinámico: VM Windows aislada + Procmon, Process Hacker, Regshark/Regshot, Wireshark, INetSim o FakeNet-NG para simular servicios de red.</a:t>
-            </a:r>
-          </a:p>
-          <a:p>
-            <a:pPr>
-              <a:spcAft>
-                <a:spcPts val="600"/>
-              </a:spcAft>
-            </a:pPr>
-            <a:r>
-              <a:rPr sz="1500">
-                <a:solidFill>
-                  <a:srgbClr val="22282E"/>
-                </a:solidFill>
-              </a:rPr>
-              <a:t>•  Sandbox automatizada (opcional): CAPEv2 o Cuckoo local; o servicios en línea (Any.Run, Hybrid Analysis, VirusTotal) solo si la muestra no es confidencial, ya que subirla la hace pública.</a:t>
-            </a:r>
-          </a:p>
-          <a:p>
-            <a:pPr>
-              <a:spcAft>
-                <a:spcPts val="600"/>
-              </a:spcAft>
-            </a:pPr>
-            <a:r>
-              <a:rPr sz="1500">
-                <a:solidFill>
-                  <a:srgbClr val="22282E"/>
-                </a:solidFill>
-              </a:rPr>
-              <a:t>•  Muestras seguras de práctica: repositorios educativos con defanged samples, retos de MalwareBazaar/CyberDefenders o binarios EICAR para validar el flujo sin riesgo real.</a:t>
+              <a:t>•  Término — Definición</a:t>
+            </a:r>
+          </a:p>
+          <a:p>
+            <a:pPr>
+              <a:spcAft>
+                <a:spcPts val="600"/>
+              </a:spcAft>
+            </a:pPr>
+            <a:r>
+              <a:rPr sz="1500">
+                <a:solidFill>
+                  <a:srgbClr val="22282E"/>
+                </a:solidFill>
+              </a:rPr>
+              <a:t>•  Evidencia — Información cuya procedencia y relación con un criterio pueden revisarse.</a:t>
+            </a:r>
+          </a:p>
+          <a:p>
+            <a:pPr>
+              <a:spcAft>
+                <a:spcPts val="600"/>
+              </a:spcAft>
+            </a:pPr>
+            <a:r>
+              <a:rPr sz="1500">
+                <a:solidFill>
+                  <a:srgbClr val="22282E"/>
+                </a:solidFill>
+              </a:rPr>
+              <a:t>•  Supuesto — Condición declarada de la que depende una conclusión.</a:t>
+            </a:r>
+          </a:p>
+          <a:p>
+            <a:pPr>
+              <a:spcAft>
+                <a:spcPts val="600"/>
+              </a:spcAft>
+            </a:pPr>
+            <a:r>
+              <a:rPr sz="1500">
+                <a:solidFill>
+                  <a:srgbClr val="22282E"/>
+                </a:solidFill>
+              </a:rPr>
+              <a:t>•  Riesgo residual — Exposición que permanece después del tratamiento.</a:t>
             </a:r>
           </a:p>
         </p:txBody>
@@ -4450,7 +4886,7 @@
                   <a:srgbClr val="0B3D2E"/>
                 </a:solidFill>
               </a:rPr>
-              <a:t>🧪 Laboratorio guiado</a:t>
+              <a:t>✅ Criterio de dominio</a:t>
             </a:r>
           </a:p>
         </p:txBody>
@@ -4488,97 +4924,7 @@
                   <a:srgbClr val="22282E"/>
                 </a:solidFill>
               </a:rPr>
-              <a:t>•  Analizaremos muestra.exe en dos fases: estática (host de análisis) y dinámica (VM aislada con snapshot).</a:t>
-            </a:r>
-          </a:p>
-          <a:p>
-            <a:pPr>
-              <a:spcAft>
-                <a:spcPts val="600"/>
-              </a:spcAft>
-            </a:pPr>
-            <a:r>
-              <a:rPr sz="1500">
-                <a:solidFill>
-                  <a:srgbClr val="22282E"/>
-                </a:solidFill>
-              </a:rPr>
-              <a:t>•  Fase 1 — Triaje estático (sin ejecutar):</a:t>
-            </a:r>
-          </a:p>
-          <a:p>
-            <a:pPr>
-              <a:spcAft>
-                <a:spcPts val="600"/>
-              </a:spcAft>
-            </a:pPr>
-            <a:r>
-              <a:rPr sz="1500">
-                <a:solidFill>
-                  <a:srgbClr val="22282E"/>
-                </a:solidFill>
-              </a:rPr>
-              <a:t>•  Identifica y hashea la muestra:</a:t>
-            </a:r>
-          </a:p>
-          <a:p>
-            <a:pPr>
-              <a:spcAft>
-                <a:spcPts val="600"/>
-              </a:spcAft>
-            </a:pPr>
-            <a:r>
-              <a:rPr sz="1500">
-                <a:solidFill>
-                  <a:srgbClr val="22282E"/>
-                </a:solidFill>
-              </a:rPr>
-              <a:t>•  file muestra.exe</a:t>
-            </a:r>
-          </a:p>
-          <a:p>
-            <a:pPr>
-              <a:spcAft>
-                <a:spcPts val="600"/>
-              </a:spcAft>
-            </a:pPr>
-            <a:r>
-              <a:rPr sz="1500">
-                <a:solidFill>
-                  <a:srgbClr val="22282E"/>
-                </a:solidFill>
-              </a:rPr>
-              <a:t>•  sha256sum muestra.exe | tee muestra.sha256</a:t>
-            </a:r>
-          </a:p>
-          <a:p>
-            <a:pPr>
-              <a:spcAft>
-                <a:spcPts val="600"/>
-              </a:spcAft>
-            </a:pPr>
-            <a:r>
-              <a:rPr sz="1500">
-                <a:solidFill>
-                  <a:srgbClr val="22282E"/>
-                </a:solidFill>
-              </a:rPr>
-              <a:t>•  Busca el hash en tu inteligencia de amenazas para ver si ya está catalogado.</a:t>
-            </a:r>
-          </a:p>
-          <a:p>
-            <a:pPr>
-              <a:spcAft>
-                <a:spcPts val="600"/>
-              </a:spcAft>
-            </a:pPr>
-            <a:r>
-              <a:rPr sz="1500">
-                <a:solidFill>
-                  <a:srgbClr val="22282E"/>
-                </a:solidFill>
-              </a:rPr>
-              <a:t>•  Mide la entropía y detecta empaquetado:</a:t>
+              <a:t>•  El alumno demuestra dominio cuando explica el diagrama, resuelve el caso con evidencia, declara límites y puede defender por qué su decisión cambia si cambia un supuesto.</a:t>
             </a:r>
           </a:p>
         </p:txBody>
@@ -4629,7 +4975,7 @@
                   <a:srgbClr val="0B3D2E"/>
                 </a:solidFill>
               </a:rPr>
-              <a:t>✍️ Ejercicios</a:t>
+              <a:t>📖 Definiciones y características</a:t>
             </a:r>
           </a:p>
         </p:txBody>
@@ -4667,82 +5013,97 @@
                   <a:srgbClr val="22282E"/>
                 </a:solidFill>
               </a:rPr>
-              <a:t>•  Toma tres muestras de práctica y clasifícalas como empaquetada / no empaquetada usando entropía e imports.</a:t>
-            </a:r>
-          </a:p>
-          <a:p>
-            <a:pPr>
-              <a:spcAft>
-                <a:spcPts val="600"/>
-              </a:spcAft>
-            </a:pPr>
-            <a:r>
-              <a:rPr sz="1500">
-                <a:solidFill>
-                  <a:srgbClr val="22282E"/>
-                </a:solidFill>
-              </a:rPr>
-              <a:t>•  Extrae de una muestra al menos cinco IOCs (2 de red, 3 de host) y preséntalos en formato tabla.</a:t>
-            </a:r>
-          </a:p>
-          <a:p>
-            <a:pPr>
-              <a:spcAft>
-                <a:spcPts val="600"/>
-              </a:spcAft>
-            </a:pPr>
-            <a:r>
-              <a:rPr sz="1500">
-                <a:solidFill>
-                  <a:srgbClr val="22282E"/>
-                </a:solidFill>
-              </a:rPr>
-              <a:t>•  Escribe una regla YARA sencilla que detecte una cadena única de tu muestra y valídala.</a:t>
-            </a:r>
-          </a:p>
-          <a:p>
-            <a:pPr>
-              <a:spcAft>
-                <a:spcPts val="600"/>
-              </a:spcAft>
-            </a:pPr>
-            <a:r>
-              <a:rPr sz="1500">
-                <a:solidFill>
-                  <a:srgbClr val="22282E"/>
-                </a:solidFill>
-              </a:rPr>
-              <a:t>•  Detona una muestra en la VM aislada y documenta su mecanismo de persistencia con evidencia de Regshot.</a:t>
-            </a:r>
-          </a:p>
-          <a:p>
-            <a:pPr>
-              <a:spcAft>
-                <a:spcPts val="600"/>
-              </a:spcAft>
-            </a:pPr>
-            <a:r>
-              <a:rPr sz="1500">
-                <a:solidFill>
-                  <a:srgbClr val="22282E"/>
-                </a:solidFill>
-              </a:rPr>
-              <a:t>•  Ejecuta capa sobre un binario y traduce tres capacidades a técnicas ATT&amp;CK con su ID.</a:t>
-            </a:r>
-          </a:p>
-          <a:p>
-            <a:pPr>
-              <a:spcAft>
-                <a:spcPts val="600"/>
-              </a:spcAft>
-            </a:pPr>
-            <a:r>
-              <a:rPr sz="1500">
-                <a:solidFill>
-                  <a:srgbClr val="22282E"/>
-                </a:solidFill>
-              </a:rPr>
-              <a:t>•  Correlaciona la hora de un archivo soltado por el malware con un evento de Sysmon para situarlo en la timeline.</a:t>
+              <a:t>•  Triaje de malware: evaluación inicial rápida para priorizar. Característica clave: busca suficiente información para decidir y actuar, no el análisis total.</a:t>
+            </a:r>
+          </a:p>
+          <a:p>
+            <a:pPr>
+              <a:spcAft>
+                <a:spcPts val="600"/>
+              </a:spcAft>
+            </a:pPr>
+            <a:r>
+              <a:rPr sz="1500">
+                <a:solidFill>
+                  <a:srgbClr val="22282E"/>
+                </a:solidFill>
+              </a:rPr>
+              <a:t>•  IOC (Indicator of Compromise): artefacto observable que evidencia una intrusión (hash, IP, dominio, mutex, ruta). Característica clave: accionable para detección y bloqueo.</a:t>
+            </a:r>
+          </a:p>
+          <a:p>
+            <a:pPr>
+              <a:spcAft>
+                <a:spcPts val="600"/>
+              </a:spcAft>
+            </a:pPr>
+            <a:r>
+              <a:rPr sz="1500">
+                <a:solidFill>
+                  <a:srgbClr val="22282E"/>
+                </a:solidFill>
+              </a:rPr>
+              <a:t>•  Análisis estático: examen del binario sin ejecutarlo. Característica clave: seguro y rápido, pero limitado frente a ofuscación y empaquetado.</a:t>
+            </a:r>
+          </a:p>
+          <a:p>
+            <a:pPr>
+              <a:spcAft>
+                <a:spcPts val="600"/>
+              </a:spcAft>
+            </a:pPr>
+            <a:r>
+              <a:rPr sz="1500">
+                <a:solidFill>
+                  <a:srgbClr val="22282E"/>
+                </a:solidFill>
+              </a:rPr>
+              <a:t>•  Análisis dinámico: observación del malware en ejecución en un entorno controlado. Característica clave: revela comportamiento real, pero requiere aislamiento estricto.</a:t>
+            </a:r>
+          </a:p>
+          <a:p>
+            <a:pPr>
+              <a:spcAft>
+                <a:spcPts val="600"/>
+              </a:spcAft>
+            </a:pPr>
+            <a:r>
+              <a:rPr sz="1500">
+                <a:solidFill>
+                  <a:srgbClr val="22282E"/>
+                </a:solidFill>
+              </a:rPr>
+              <a:t>•  YARA: lenguaje de reglas para identificar patrones en archivos/memoria. Característica clave: reutilizable para hunting a escala.</a:t>
+            </a:r>
+          </a:p>
+          <a:p>
+            <a:pPr>
+              <a:spcAft>
+                <a:spcPts val="600"/>
+              </a:spcAft>
+            </a:pPr>
+            <a:r>
+              <a:rPr sz="1500">
+                <a:solidFill>
+                  <a:srgbClr val="22282E"/>
+                </a:solidFill>
+              </a:rPr>
+              <a:t>•  capa: herramienta que infiere capacidades del binario (p. ej. "crea servicio", "captura teclado") a partir de patrones. Característica clave: traduce bytes en comportamiento legible y lo mapea a…</a:t>
+            </a:r>
+          </a:p>
+          <a:p>
+            <a:pPr>
+              <a:spcAft>
+                <a:spcPts val="600"/>
+              </a:spcAft>
+            </a:pPr>
+            <a:r>
+              <a:rPr sz="1500">
+                <a:solidFill>
+                  <a:srgbClr val="22282E"/>
+                </a:solidFill>
+              </a:rPr>
+              <a:t>•  TTP (Tácticas, Técnicas y Procedimientos): el cómo del adversario. Característica clave: más estable que los IOCs (la "pirámide del dolor" de David Bianco).</a:t>
             </a:r>
           </a:p>
         </p:txBody>
@@ -4793,7 +5154,7 @@
                   <a:srgbClr val="0B3D2E"/>
                 </a:solidFill>
               </a:rPr>
-              <a:t>📝 Reto verificable</a:t>
+              <a:t>🧰 Herramientas y preparación</a:t>
             </a:r>
           </a:p>
         </p:txBody>
@@ -4831,7 +5192,52 @@
                   <a:srgbClr val="22282E"/>
                 </a:solidFill>
               </a:rPr>
-              <a:t>•  Recibes dropper.exe como parte de un incidente en curso. Criterio de aceptación: entregas un mini-informe DFIR de una página que incluye (a) hash SHA-256 y veredicto de empaquetado, (b) al menos 4 IOCs accionables (dominio/IP de C2, mutex, clave de persistencia), (c) 3 técnicas ATT&amp;CK con su ID justificadas por el comportamiento observado, y (d) una recomendación de contención concreta (qué bloquear/aislar). El reto se logra si un analista de contención puede actuar directamente con tus IOCs sin volver a analizar la muestra.</a:t>
+              <a:t>•  Estático: file, sha256sum, strings, pefile/PE-bear, Detect It Easy (DIE), capa, yara.</a:t>
+            </a:r>
+          </a:p>
+          <a:p>
+            <a:pPr>
+              <a:spcAft>
+                <a:spcPts val="600"/>
+              </a:spcAft>
+            </a:pPr>
+            <a:r>
+              <a:rPr sz="1500">
+                <a:solidFill>
+                  <a:srgbClr val="22282E"/>
+                </a:solidFill>
+              </a:rPr>
+              <a:t>•  Dinámico: VM Windows aislada + Procmon, Process Hacker, Regshark/Regshot, Wireshark, INetSim o FakeNet-NG para simular servicios de red.</a:t>
+            </a:r>
+          </a:p>
+          <a:p>
+            <a:pPr>
+              <a:spcAft>
+                <a:spcPts val="600"/>
+              </a:spcAft>
+            </a:pPr>
+            <a:r>
+              <a:rPr sz="1500">
+                <a:solidFill>
+                  <a:srgbClr val="22282E"/>
+                </a:solidFill>
+              </a:rPr>
+              <a:t>•  Sandbox automatizada (opcional): CAPEv2 o Cuckoo local; o servicios en línea (Any.Run, Hybrid Analysis, VirusTotal) solo si la muestra no es confidencial, ya que subirla la hace pública.</a:t>
+            </a:r>
+          </a:p>
+          <a:p>
+            <a:pPr>
+              <a:spcAft>
+                <a:spcPts val="600"/>
+              </a:spcAft>
+            </a:pPr>
+            <a:r>
+              <a:rPr sz="1500">
+                <a:solidFill>
+                  <a:srgbClr val="22282E"/>
+                </a:solidFill>
+              </a:rPr>
+              <a:t>•  Muestras seguras de práctica: repositorios educativos con defanged samples, retos de MalwareBazaar/CyberDefenders o binarios EICAR para validar el flujo sin riesgo real.</a:t>
             </a:r>
           </a:p>
         </p:txBody>
